--- a/shiori-thumbnail/v2/out/shiori_v2_ABC.pptx
+++ b/shiori-thumbnail/v2/out/shiori_v2_ABC.pptx
@@ -3878,8 +3878,8 @@
         </p:nvSpPr>
         <p:spPr>
           <a:xfrm>
-            <a:off x="7239000" y="10725150"/>
-            <a:ext cx="2514600" cy="762000"/>
+            <a:off x="6324600" y="10725150"/>
+            <a:ext cx="3429000" cy="762000"/>
           </a:xfrm>
           <a:prstGeom prst="rect">
             <a:avLst/>
